--- a/Synopsys_Cadence_Architecture.pptx
+++ b/Synopsys_Cadence_Architecture.pptx
@@ -3112,7 +3112,7 @@
             <a:avLst/>
           </a:prstGeom>
           <a:solidFill>
-            <a:srgbClr val="4DA8DA"/>
+            <a:srgbClr val="81B622"/>
           </a:solidFill>
           <a:ln>
             <a:noFill/>
@@ -3165,7 +3165,7 @@
             <a:pPr algn="l">
               <a:defRPr sz="1100" b="1">
                 <a:solidFill>
-                  <a:srgbClr val="4DA8DA"/>
+                  <a:srgbClr val="81B622"/>
                 </a:solidFill>
                 <a:latin typeface="Segoe UI"/>
               </a:defRPr>
@@ -3538,7 +3538,7 @@
         </p:nvSpPr>
         <p:spPr>
           <a:xfrm>
-            <a:off x="457200" y="1051560"/>
+            <a:off x="457200" y="1097280"/>
             <a:ext cx="6492240" cy="320040"/>
           </a:xfrm>
           <a:prstGeom prst="roundRect">
@@ -3583,7 +3583,7 @@
         </p:nvSpPr>
         <p:spPr>
           <a:xfrm>
-            <a:off x="594360" y="1088136"/>
+            <a:off x="594360" y="1133856"/>
             <a:ext cx="6217920" cy="320040"/>
           </a:xfrm>
           <a:prstGeom prst="rect">
@@ -3619,7 +3619,7 @@
         </p:nvSpPr>
         <p:spPr>
           <a:xfrm>
-            <a:off x="4937760" y="1088136"/>
+            <a:off x="4937760" y="1133856"/>
             <a:ext cx="1920240" cy="320040"/>
           </a:xfrm>
           <a:prstGeom prst="rect">
@@ -3655,8 +3655,8 @@
         </p:nvSpPr>
         <p:spPr>
           <a:xfrm>
-            <a:off x="457200" y="1463040"/>
-            <a:ext cx="6492240" cy="1097280"/>
+            <a:off x="457200" y="1527048"/>
+            <a:ext cx="6492240" cy="1234440"/>
           </a:xfrm>
           <a:prstGeom prst="roundRect">
             <a:avLst>
@@ -3702,7 +3702,7 @@
         </p:nvSpPr>
         <p:spPr>
           <a:xfrm>
-            <a:off x="566928" y="1572768"/>
+            <a:off x="566928" y="1636776"/>
             <a:ext cx="292608" cy="292608"/>
           </a:xfrm>
           <a:prstGeom prst="ellipse">
@@ -3734,6 +3734,12 @@
           <a:lstStyle/>
           <a:p>
             <a:pPr algn="ctr">
+              <a:spcBef>
+                <a:spcPts val="0"/>
+              </a:spcBef>
+              <a:spcAft>
+                <a:spcPts val="0"/>
+              </a:spcAft>
               <a:defRPr sz="800" b="1">
                 <a:solidFill>
                   <a:srgbClr val="FFFFFF"/>
@@ -3755,7 +3761,7 @@
         </p:nvSpPr>
         <p:spPr>
           <a:xfrm>
-            <a:off x="914400" y="1536192"/>
+            <a:off x="914400" y="1600200"/>
             <a:ext cx="5943600" cy="274320"/>
           </a:xfrm>
           <a:prstGeom prst="rect">
@@ -3791,7 +3797,7 @@
         </p:nvSpPr>
         <p:spPr>
           <a:xfrm>
-            <a:off x="6035040" y="1554480"/>
+            <a:off x="6035040" y="1618488"/>
             <a:ext cx="777240" cy="201168"/>
           </a:xfrm>
           <a:prstGeom prst="roundRect">
@@ -3848,8 +3854,8 @@
         </p:nvSpPr>
         <p:spPr>
           <a:xfrm>
-            <a:off x="594360" y="1847088"/>
-            <a:ext cx="6217920" cy="640080"/>
+            <a:off x="594360" y="1911096"/>
+            <a:ext cx="6217920" cy="777240"/>
           </a:xfrm>
           <a:prstGeom prst="rect">
             <a:avLst/>
@@ -3884,7 +3890,7 @@
         </p:nvSpPr>
         <p:spPr>
           <a:xfrm>
-            <a:off x="3621024" y="2578608"/>
+            <a:off x="3621024" y="2761488"/>
             <a:ext cx="164592" cy="228600"/>
           </a:xfrm>
           <a:prstGeom prst="downArrow">
@@ -3927,8 +3933,8 @@
         </p:nvSpPr>
         <p:spPr>
           <a:xfrm>
-            <a:off x="457200" y="2852928"/>
-            <a:ext cx="6492240" cy="1097280"/>
+            <a:off x="457200" y="3008376"/>
+            <a:ext cx="6492240" cy="1234440"/>
           </a:xfrm>
           <a:prstGeom prst="roundRect">
             <a:avLst>
@@ -3974,7 +3980,7 @@
         </p:nvSpPr>
         <p:spPr>
           <a:xfrm>
-            <a:off x="566928" y="2962656"/>
+            <a:off x="566928" y="3118104"/>
             <a:ext cx="292608" cy="292608"/>
           </a:xfrm>
           <a:prstGeom prst="ellipse">
@@ -4006,6 +4012,12 @@
           <a:lstStyle/>
           <a:p>
             <a:pPr algn="ctr">
+              <a:spcBef>
+                <a:spcPts val="0"/>
+              </a:spcBef>
+              <a:spcAft>
+                <a:spcPts val="0"/>
+              </a:spcAft>
               <a:defRPr sz="800" b="1">
                 <a:solidFill>
                   <a:srgbClr val="FFFFFF"/>
@@ -4027,7 +4039,7 @@
         </p:nvSpPr>
         <p:spPr>
           <a:xfrm>
-            <a:off x="914400" y="2926080"/>
+            <a:off x="914400" y="3081528"/>
             <a:ext cx="5943600" cy="274320"/>
           </a:xfrm>
           <a:prstGeom prst="rect">
@@ -4063,8 +4075,8 @@
         </p:nvSpPr>
         <p:spPr>
           <a:xfrm>
-            <a:off x="594360" y="3236976"/>
-            <a:ext cx="6217920" cy="640080"/>
+            <a:off x="594360" y="3392424"/>
+            <a:ext cx="6217920" cy="777240"/>
           </a:xfrm>
           <a:prstGeom prst="rect">
             <a:avLst/>
@@ -4099,7 +4111,7 @@
         </p:nvSpPr>
         <p:spPr>
           <a:xfrm>
-            <a:off x="3621024" y="3968496"/>
+            <a:off x="3621024" y="4242816"/>
             <a:ext cx="164592" cy="228600"/>
           </a:xfrm>
           <a:prstGeom prst="downArrow">
@@ -4142,8 +4154,8 @@
         </p:nvSpPr>
         <p:spPr>
           <a:xfrm>
-            <a:off x="457200" y="4242816"/>
-            <a:ext cx="6492240" cy="1097280"/>
+            <a:off x="457200" y="4489704"/>
+            <a:ext cx="6492240" cy="1234440"/>
           </a:xfrm>
           <a:prstGeom prst="roundRect">
             <a:avLst>
@@ -4189,7 +4201,7 @@
         </p:nvSpPr>
         <p:spPr>
           <a:xfrm>
-            <a:off x="566928" y="4352544"/>
+            <a:off x="566928" y="4599432"/>
             <a:ext cx="292608" cy="292608"/>
           </a:xfrm>
           <a:prstGeom prst="ellipse">
@@ -4221,6 +4233,12 @@
           <a:lstStyle/>
           <a:p>
             <a:pPr algn="ctr">
+              <a:spcBef>
+                <a:spcPts val="0"/>
+              </a:spcBef>
+              <a:spcAft>
+                <a:spcPts val="0"/>
+              </a:spcAft>
               <a:defRPr sz="800" b="1">
                 <a:solidFill>
                   <a:srgbClr val="FFFFFF"/>
@@ -4242,7 +4260,7 @@
         </p:nvSpPr>
         <p:spPr>
           <a:xfrm>
-            <a:off x="914400" y="4315968"/>
+            <a:off x="914400" y="4562856"/>
             <a:ext cx="5943600" cy="274320"/>
           </a:xfrm>
           <a:prstGeom prst="rect">
@@ -4278,7 +4296,7 @@
         </p:nvSpPr>
         <p:spPr>
           <a:xfrm>
-            <a:off x="6035040" y="4334256"/>
+            <a:off x="6035040" y="4581144"/>
             <a:ext cx="777240" cy="201168"/>
           </a:xfrm>
           <a:prstGeom prst="roundRect">
@@ -4335,8 +4353,8 @@
         </p:nvSpPr>
         <p:spPr>
           <a:xfrm>
-            <a:off x="594360" y="4626864"/>
-            <a:ext cx="6217920" cy="640080"/>
+            <a:off x="594360" y="4873752"/>
+            <a:ext cx="6217920" cy="777240"/>
           </a:xfrm>
           <a:prstGeom prst="rect">
             <a:avLst/>
@@ -4371,7 +4389,7 @@
         </p:nvSpPr>
         <p:spPr>
           <a:xfrm>
-            <a:off x="3621024" y="5358384"/>
+            <a:off x="3621024" y="5724144"/>
             <a:ext cx="164592" cy="228600"/>
           </a:xfrm>
           <a:prstGeom prst="downArrow">
@@ -4414,8 +4432,8 @@
         </p:nvSpPr>
         <p:spPr>
           <a:xfrm>
-            <a:off x="457200" y="5632704"/>
-            <a:ext cx="6492240" cy="1097280"/>
+            <a:off x="457200" y="5971032"/>
+            <a:ext cx="6492240" cy="1234440"/>
           </a:xfrm>
           <a:prstGeom prst="roundRect">
             <a:avLst>
@@ -4461,7 +4479,7 @@
         </p:nvSpPr>
         <p:spPr>
           <a:xfrm>
-            <a:off x="566928" y="5742432"/>
+            <a:off x="566928" y="6080760"/>
             <a:ext cx="292608" cy="292608"/>
           </a:xfrm>
           <a:prstGeom prst="ellipse">
@@ -4493,6 +4511,12 @@
           <a:lstStyle/>
           <a:p>
             <a:pPr algn="ctr">
+              <a:spcBef>
+                <a:spcPts val="0"/>
+              </a:spcBef>
+              <a:spcAft>
+                <a:spcPts val="0"/>
+              </a:spcAft>
               <a:defRPr sz="800" b="1">
                 <a:solidFill>
                   <a:srgbClr val="FFFFFF"/>
@@ -4514,7 +4538,7 @@
         </p:nvSpPr>
         <p:spPr>
           <a:xfrm>
-            <a:off x="914400" y="5705856"/>
+            <a:off x="914400" y="6044184"/>
             <a:ext cx="5943600" cy="274320"/>
           </a:xfrm>
           <a:prstGeom prst="rect">
@@ -4550,8 +4574,8 @@
         </p:nvSpPr>
         <p:spPr>
           <a:xfrm>
-            <a:off x="594360" y="6016752"/>
-            <a:ext cx="6217920" cy="640080"/>
+            <a:off x="594360" y="6355080"/>
+            <a:ext cx="6217920" cy="777240"/>
           </a:xfrm>
           <a:prstGeom prst="rect">
             <a:avLst/>
@@ -4586,7 +4610,7 @@
         </p:nvSpPr>
         <p:spPr>
           <a:xfrm>
-            <a:off x="7680960" y="1051560"/>
+            <a:off x="7680960" y="1097280"/>
             <a:ext cx="6492240" cy="320040"/>
           </a:xfrm>
           <a:prstGeom prst="roundRect">
@@ -4631,7 +4655,7 @@
         </p:nvSpPr>
         <p:spPr>
           <a:xfrm>
-            <a:off x="7818120" y="1088136"/>
+            <a:off x="7818120" y="1133856"/>
             <a:ext cx="6217920" cy="320040"/>
           </a:xfrm>
           <a:prstGeom prst="rect">
@@ -4667,7 +4691,7 @@
         </p:nvSpPr>
         <p:spPr>
           <a:xfrm>
-            <a:off x="12161520" y="1088136"/>
+            <a:off x="12161520" y="1133856"/>
             <a:ext cx="1920240" cy="320040"/>
           </a:xfrm>
           <a:prstGeom prst="rect">
@@ -4703,8 +4727,8 @@
         </p:nvSpPr>
         <p:spPr>
           <a:xfrm>
-            <a:off x="7680960" y="1463040"/>
-            <a:ext cx="6492240" cy="1097280"/>
+            <a:off x="7680960" y="1527048"/>
+            <a:ext cx="6492240" cy="1234440"/>
           </a:xfrm>
           <a:prstGeom prst="roundRect">
             <a:avLst>
@@ -4750,7 +4774,7 @@
         </p:nvSpPr>
         <p:spPr>
           <a:xfrm>
-            <a:off x="7790688" y="1572768"/>
+            <a:off x="7790688" y="1636776"/>
             <a:ext cx="292608" cy="292608"/>
           </a:xfrm>
           <a:prstGeom prst="ellipse">
@@ -4782,6 +4806,12 @@
           <a:lstStyle/>
           <a:p>
             <a:pPr algn="ctr">
+              <a:spcBef>
+                <a:spcPts val="0"/>
+              </a:spcBef>
+              <a:spcAft>
+                <a:spcPts val="0"/>
+              </a:spcAft>
               <a:defRPr sz="800" b="1">
                 <a:solidFill>
                   <a:srgbClr val="FFFFFF"/>
@@ -4803,7 +4833,7 @@
         </p:nvSpPr>
         <p:spPr>
           <a:xfrm>
-            <a:off x="8138160" y="1536192"/>
+            <a:off x="8138160" y="1600200"/>
             <a:ext cx="5943600" cy="274320"/>
           </a:xfrm>
           <a:prstGeom prst="rect">
@@ -4839,7 +4869,7 @@
         </p:nvSpPr>
         <p:spPr>
           <a:xfrm>
-            <a:off x="13258800" y="1554480"/>
+            <a:off x="13258800" y="1618488"/>
             <a:ext cx="777240" cy="201168"/>
           </a:xfrm>
           <a:prstGeom prst="roundRect">
@@ -4896,8 +4926,8 @@
         </p:nvSpPr>
         <p:spPr>
           <a:xfrm>
-            <a:off x="7818120" y="1847088"/>
-            <a:ext cx="6217920" cy="640080"/>
+            <a:off x="7818120" y="1911096"/>
+            <a:ext cx="6217920" cy="777240"/>
           </a:xfrm>
           <a:prstGeom prst="rect">
             <a:avLst/>
@@ -4932,7 +4962,7 @@
         </p:nvSpPr>
         <p:spPr>
           <a:xfrm>
-            <a:off x="10844784" y="2578608"/>
+            <a:off x="10844784" y="2761488"/>
             <a:ext cx="164592" cy="228600"/>
           </a:xfrm>
           <a:prstGeom prst="downArrow">
@@ -4975,8 +5005,8 @@
         </p:nvSpPr>
         <p:spPr>
           <a:xfrm>
-            <a:off x="7680960" y="2852928"/>
-            <a:ext cx="6492240" cy="1097280"/>
+            <a:off x="7680960" y="3008376"/>
+            <a:ext cx="6492240" cy="1234440"/>
           </a:xfrm>
           <a:prstGeom prst="roundRect">
             <a:avLst>
@@ -5022,7 +5052,7 @@
         </p:nvSpPr>
         <p:spPr>
           <a:xfrm>
-            <a:off x="7790688" y="2962656"/>
+            <a:off x="7790688" y="3118104"/>
             <a:ext cx="292608" cy="292608"/>
           </a:xfrm>
           <a:prstGeom prst="ellipse">
@@ -5054,6 +5084,12 @@
           <a:lstStyle/>
           <a:p>
             <a:pPr algn="ctr">
+              <a:spcBef>
+                <a:spcPts val="0"/>
+              </a:spcBef>
+              <a:spcAft>
+                <a:spcPts val="0"/>
+              </a:spcAft>
               <a:defRPr sz="800" b="1">
                 <a:solidFill>
                   <a:srgbClr val="FFFFFF"/>
@@ -5075,7 +5111,7 @@
         </p:nvSpPr>
         <p:spPr>
           <a:xfrm>
-            <a:off x="8138160" y="2926080"/>
+            <a:off x="8138160" y="3081528"/>
             <a:ext cx="5943600" cy="274320"/>
           </a:xfrm>
           <a:prstGeom prst="rect">
@@ -5111,8 +5147,8 @@
         </p:nvSpPr>
         <p:spPr>
           <a:xfrm>
-            <a:off x="7818120" y="3236976"/>
-            <a:ext cx="6217920" cy="640080"/>
+            <a:off x="7818120" y="3392424"/>
+            <a:ext cx="6217920" cy="777240"/>
           </a:xfrm>
           <a:prstGeom prst="rect">
             <a:avLst/>
@@ -5147,7 +5183,7 @@
         </p:nvSpPr>
         <p:spPr>
           <a:xfrm>
-            <a:off x="10844784" y="3968496"/>
+            <a:off x="10844784" y="4242816"/>
             <a:ext cx="164592" cy="228600"/>
           </a:xfrm>
           <a:prstGeom prst="downArrow">
@@ -5190,8 +5226,8 @@
         </p:nvSpPr>
         <p:spPr>
           <a:xfrm>
-            <a:off x="7680960" y="4242816"/>
-            <a:ext cx="6492240" cy="1097280"/>
+            <a:off x="7680960" y="4489704"/>
+            <a:ext cx="6492240" cy="1234440"/>
           </a:xfrm>
           <a:prstGeom prst="roundRect">
             <a:avLst>
@@ -5237,7 +5273,7 @@
         </p:nvSpPr>
         <p:spPr>
           <a:xfrm>
-            <a:off x="7790688" y="4352544"/>
+            <a:off x="7790688" y="4599432"/>
             <a:ext cx="292608" cy="292608"/>
           </a:xfrm>
           <a:prstGeom prst="ellipse">
@@ -5269,6 +5305,12 @@
           <a:lstStyle/>
           <a:p>
             <a:pPr algn="ctr">
+              <a:spcBef>
+                <a:spcPts val="0"/>
+              </a:spcBef>
+              <a:spcAft>
+                <a:spcPts val="0"/>
+              </a:spcAft>
               <a:defRPr sz="800" b="1">
                 <a:solidFill>
                   <a:srgbClr val="FFFFFF"/>
@@ -5290,7 +5332,7 @@
         </p:nvSpPr>
         <p:spPr>
           <a:xfrm>
-            <a:off x="8138160" y="4315968"/>
+            <a:off x="8138160" y="4562856"/>
             <a:ext cx="5943600" cy="274320"/>
           </a:xfrm>
           <a:prstGeom prst="rect">
@@ -5326,8 +5368,8 @@
         </p:nvSpPr>
         <p:spPr>
           <a:xfrm>
-            <a:off x="7818120" y="4626864"/>
-            <a:ext cx="6217920" cy="640080"/>
+            <a:off x="7818120" y="4873752"/>
+            <a:ext cx="6217920" cy="777240"/>
           </a:xfrm>
           <a:prstGeom prst="rect">
             <a:avLst/>
@@ -5362,7 +5404,7 @@
         </p:nvSpPr>
         <p:spPr>
           <a:xfrm>
-            <a:off x="10844784" y="5358384"/>
+            <a:off x="10844784" y="5724144"/>
             <a:ext cx="164592" cy="228600"/>
           </a:xfrm>
           <a:prstGeom prst="downArrow">
@@ -5405,8 +5447,8 @@
         </p:nvSpPr>
         <p:spPr>
           <a:xfrm>
-            <a:off x="7680960" y="5632704"/>
-            <a:ext cx="6492240" cy="1097280"/>
+            <a:off x="7680960" y="5971032"/>
+            <a:ext cx="6492240" cy="1234440"/>
           </a:xfrm>
           <a:prstGeom prst="roundRect">
             <a:avLst>
@@ -5452,7 +5494,7 @@
         </p:nvSpPr>
         <p:spPr>
           <a:xfrm>
-            <a:off x="7790688" y="5742432"/>
+            <a:off x="7790688" y="6080760"/>
             <a:ext cx="292608" cy="292608"/>
           </a:xfrm>
           <a:prstGeom prst="ellipse">
@@ -5484,6 +5526,12 @@
           <a:lstStyle/>
           <a:p>
             <a:pPr algn="ctr">
+              <a:spcBef>
+                <a:spcPts val="0"/>
+              </a:spcBef>
+              <a:spcAft>
+                <a:spcPts val="0"/>
+              </a:spcAft>
               <a:defRPr sz="800" b="1">
                 <a:solidFill>
                   <a:srgbClr val="FFFFFF"/>
@@ -5505,7 +5553,7 @@
         </p:nvSpPr>
         <p:spPr>
           <a:xfrm>
-            <a:off x="8138160" y="5705856"/>
+            <a:off x="8138160" y="6044184"/>
             <a:ext cx="5943600" cy="274320"/>
           </a:xfrm>
           <a:prstGeom prst="rect">
@@ -5541,7 +5589,7 @@
         </p:nvSpPr>
         <p:spPr>
           <a:xfrm>
-            <a:off x="13258800" y="5724144"/>
+            <a:off x="13258800" y="6062472"/>
             <a:ext cx="777240" cy="201168"/>
           </a:xfrm>
           <a:prstGeom prst="roundRect">
@@ -5598,8 +5646,8 @@
         </p:nvSpPr>
         <p:spPr>
           <a:xfrm>
-            <a:off x="7818120" y="6016752"/>
-            <a:ext cx="6217920" cy="640080"/>
+            <a:off x="7818120" y="6355080"/>
+            <a:ext cx="6217920" cy="777240"/>
           </a:xfrm>
           <a:prstGeom prst="rect">
             <a:avLst/>
@@ -5634,7 +5682,7 @@
         </p:nvSpPr>
         <p:spPr>
           <a:xfrm>
-            <a:off x="7086600" y="1929384"/>
+            <a:off x="7086600" y="2061972"/>
             <a:ext cx="457200" cy="164592"/>
           </a:xfrm>
           <a:prstGeom prst="rightArrow">
@@ -5677,7 +5725,7 @@
         </p:nvSpPr>
         <p:spPr>
           <a:xfrm>
-            <a:off x="7086600" y="2130552"/>
+            <a:off x="7086600" y="2263140"/>
             <a:ext cx="457200" cy="164592"/>
           </a:xfrm>
           <a:prstGeom prst="leftArrow">
@@ -5720,7 +5768,7 @@
         </p:nvSpPr>
         <p:spPr>
           <a:xfrm>
-            <a:off x="7086600" y="3319272"/>
+            <a:off x="7086600" y="3543300"/>
             <a:ext cx="457200" cy="164592"/>
           </a:xfrm>
           <a:prstGeom prst="rightArrow">
@@ -5763,7 +5811,7 @@
         </p:nvSpPr>
         <p:spPr>
           <a:xfrm>
-            <a:off x="7086600" y="3520440"/>
+            <a:off x="7086600" y="3744468"/>
             <a:ext cx="457200" cy="164592"/>
           </a:xfrm>
           <a:prstGeom prst="leftArrow">
@@ -5806,7 +5854,7 @@
         </p:nvSpPr>
         <p:spPr>
           <a:xfrm>
-            <a:off x="7086600" y="4709160"/>
+            <a:off x="7086600" y="5024628"/>
             <a:ext cx="457200" cy="164592"/>
           </a:xfrm>
           <a:prstGeom prst="rightArrow">
@@ -5849,7 +5897,7 @@
         </p:nvSpPr>
         <p:spPr>
           <a:xfrm>
-            <a:off x="7086600" y="4910328"/>
+            <a:off x="7086600" y="5225796"/>
             <a:ext cx="457200" cy="164592"/>
           </a:xfrm>
           <a:prstGeom prst="leftArrow">
@@ -5892,7 +5940,7 @@
         </p:nvSpPr>
         <p:spPr>
           <a:xfrm>
-            <a:off x="7086600" y="6099048"/>
+            <a:off x="7086600" y="6505956"/>
             <a:ext cx="457200" cy="164592"/>
           </a:xfrm>
           <a:prstGeom prst="rightArrow">
@@ -5935,7 +5983,7 @@
         </p:nvSpPr>
         <p:spPr>
           <a:xfrm>
-            <a:off x="7086600" y="6300216"/>
+            <a:off x="7086600" y="6707124"/>
             <a:ext cx="457200" cy="164592"/>
           </a:xfrm>
           <a:prstGeom prst="leftArrow">
@@ -5978,8 +6026,8 @@
         </p:nvSpPr>
         <p:spPr>
           <a:xfrm>
-            <a:off x="457200" y="6839712"/>
-            <a:ext cx="13716000" cy="502920"/>
+            <a:off x="457200" y="7278624"/>
+            <a:ext cx="13716000" cy="594360"/>
           </a:xfrm>
           <a:prstGeom prst="roundRect">
             <a:avLst>
@@ -5987,7 +6035,7 @@
             </a:avLst>
           </a:prstGeom>
           <a:solidFill>
-            <a:srgbClr val="0D2B47"/>
+            <a:srgbClr val="0D472B"/>
           </a:solidFill>
           <a:ln w="25400">
             <a:solidFill>
@@ -6025,8 +6073,8 @@
         </p:nvSpPr>
         <p:spPr>
           <a:xfrm>
-            <a:off x="640080" y="6876288"/>
-            <a:ext cx="2743200" cy="228600"/>
+            <a:off x="640080" y="7333488"/>
+            <a:ext cx="2743200" cy="274320"/>
           </a:xfrm>
           <a:prstGeom prst="rect">
             <a:avLst/>
@@ -6042,7 +6090,7 @@
             <a:pPr algn="l">
               <a:defRPr sz="1200" b="1">
                 <a:solidFill>
-                  <a:srgbClr val="4DA8DA"/>
+                  <a:srgbClr val="DC3C3C"/>
                 </a:solidFill>
                 <a:latin typeface="Segoe UI"/>
               </a:defRPr>
@@ -6061,8 +6109,8 @@
         </p:nvSpPr>
         <p:spPr>
           <a:xfrm>
-            <a:off x="640080" y="7095744"/>
-            <a:ext cx="12801600" cy="228600"/>
+            <a:off x="640080" y="7571232"/>
+            <a:ext cx="13350240" cy="274320"/>
           </a:xfrm>
           <a:prstGeom prst="rect">
             <a:avLst/>
@@ -6078,7 +6126,7 @@
             <a:pPr algn="l">
               <a:defRPr sz="900" b="0">
                 <a:solidFill>
-                  <a:srgbClr val="A5CEE8"/>
+                  <a:srgbClr val="A5D6A7"/>
                 </a:solidFill>
                 <a:latin typeface="Segoe UI"/>
               </a:defRPr>
@@ -6097,8 +6145,8 @@
         </p:nvSpPr>
         <p:spPr>
           <a:xfrm>
-            <a:off x="457200" y="7406640"/>
-            <a:ext cx="13716000" cy="502920"/>
+            <a:off x="457200" y="7936992"/>
+            <a:ext cx="13716000" cy="594360"/>
           </a:xfrm>
           <a:prstGeom prst="roundRect">
             <a:avLst>
@@ -6106,7 +6154,7 @@
             </a:avLst>
           </a:prstGeom>
           <a:solidFill>
-            <a:srgbClr val="0D2B47"/>
+            <a:srgbClr val="0D472B"/>
           </a:solidFill>
           <a:ln w="25400">
             <a:solidFill>
@@ -6144,8 +6192,8 @@
         </p:nvSpPr>
         <p:spPr>
           <a:xfrm>
-            <a:off x="640080" y="7443216"/>
-            <a:ext cx="3657600" cy="228600"/>
+            <a:off x="640080" y="7991856"/>
+            <a:ext cx="2743200" cy="274320"/>
           </a:xfrm>
           <a:prstGeom prst="rect">
             <a:avLst/>
@@ -6161,13 +6209,13 @@
             <a:pPr algn="l">
               <a:defRPr sz="1200" b="1">
                 <a:solidFill>
-                  <a:srgbClr val="4DA8DA"/>
+                  <a:srgbClr val="DC3C3C"/>
                 </a:solidFill>
                 <a:latin typeface="Segoe UI"/>
               </a:defRPr>
             </a:pPr>
             <a:r>
-              <a:t>SENTAURUS TCAD  +  SILICON LIFECYCLE</a:t>
+              <a:t>SENTAURUS TCAD + SLM</a:t>
             </a:r>
           </a:p>
         </p:txBody>
@@ -6180,8 +6228,8 @@
         </p:nvSpPr>
         <p:spPr>
           <a:xfrm>
-            <a:off x="640080" y="7662672"/>
-            <a:ext cx="12801600" cy="228600"/>
+            <a:off x="640080" y="8229600"/>
+            <a:ext cx="13350240" cy="274320"/>
           </a:xfrm>
           <a:prstGeom prst="rect">
             <a:avLst/>
@@ -6197,7 +6245,7 @@
             <a:pPr algn="l">
               <a:defRPr sz="900" b="0">
                 <a:solidFill>
-                  <a:srgbClr val="A5CEE8"/>
+                  <a:srgbClr val="A5D6A7"/>
                 </a:solidFill>
                 <a:latin typeface="Segoe UI"/>
               </a:defRPr>
@@ -6249,7 +6297,7 @@
             <a:avLst/>
           </a:prstGeom>
           <a:solidFill>
-            <a:srgbClr val="4DA8DA"/>
+            <a:srgbClr val="81B622"/>
           </a:solidFill>
           <a:ln>
             <a:noFill/>
@@ -6302,7 +6350,7 @@
             <a:pPr algn="l">
               <a:defRPr sz="1100" b="1">
                 <a:solidFill>
-                  <a:srgbClr val="4DA8DA"/>
+                  <a:srgbClr val="81B622"/>
                 </a:solidFill>
                 <a:latin typeface="Segoe UI"/>
               </a:defRPr>
@@ -6675,7 +6723,7 @@
         </p:nvSpPr>
         <p:spPr>
           <a:xfrm>
-            <a:off x="457200" y="1051560"/>
+            <a:off x="457200" y="1097280"/>
             <a:ext cx="13716000" cy="320040"/>
           </a:xfrm>
           <a:prstGeom prst="roundRect">
@@ -6720,7 +6768,7 @@
         </p:nvSpPr>
         <p:spPr>
           <a:xfrm>
-            <a:off x="594360" y="1088136"/>
+            <a:off x="594360" y="1133856"/>
             <a:ext cx="13441680" cy="320040"/>
           </a:xfrm>
           <a:prstGeom prst="rect">
@@ -6756,7 +6804,7 @@
         </p:nvSpPr>
         <p:spPr>
           <a:xfrm>
-            <a:off x="12161520" y="1088136"/>
+            <a:off x="12161520" y="1133856"/>
             <a:ext cx="1920240" cy="320040"/>
           </a:xfrm>
           <a:prstGeom prst="rect">
@@ -6792,8 +6840,8 @@
         </p:nvSpPr>
         <p:spPr>
           <a:xfrm>
-            <a:off x="457200" y="1444752"/>
-            <a:ext cx="4498848" cy="1051560"/>
+            <a:off x="457200" y="1527048"/>
+            <a:ext cx="4498848" cy="1234440"/>
           </a:xfrm>
           <a:prstGeom prst="roundRect">
             <a:avLst>
@@ -6839,7 +6887,7 @@
         </p:nvSpPr>
         <p:spPr>
           <a:xfrm>
-            <a:off x="566928" y="1554480"/>
+            <a:off x="566928" y="1636776"/>
             <a:ext cx="292608" cy="292608"/>
           </a:xfrm>
           <a:prstGeom prst="ellipse">
@@ -6871,6 +6919,12 @@
           <a:lstStyle/>
           <a:p>
             <a:pPr algn="ctr">
+              <a:spcBef>
+                <a:spcPts val="0"/>
+              </a:spcBef>
+              <a:spcAft>
+                <a:spcPts val="0"/>
+              </a:spcAft>
               <a:defRPr sz="800" b="1">
                 <a:solidFill>
                   <a:srgbClr val="FFFFFF"/>
@@ -6892,7 +6946,7 @@
         </p:nvSpPr>
         <p:spPr>
           <a:xfrm>
-            <a:off x="914400" y="1517904"/>
+            <a:off x="914400" y="1600200"/>
             <a:ext cx="3950208" cy="274320"/>
           </a:xfrm>
           <a:prstGeom prst="rect">
@@ -6928,8 +6982,8 @@
         </p:nvSpPr>
         <p:spPr>
           <a:xfrm>
-            <a:off x="594360" y="1828800"/>
-            <a:ext cx="4224528" cy="594360"/>
+            <a:off x="594360" y="1911096"/>
+            <a:ext cx="4224528" cy="777240"/>
           </a:xfrm>
           <a:prstGeom prst="rect">
             <a:avLst/>
@@ -6964,7 +7018,7 @@
         </p:nvSpPr>
         <p:spPr>
           <a:xfrm>
-            <a:off x="4956048" y="1888236"/>
+            <a:off x="4956048" y="2061972"/>
             <a:ext cx="164592" cy="164592"/>
           </a:xfrm>
           <a:prstGeom prst="rightArrow">
@@ -7007,8 +7061,8 @@
         </p:nvSpPr>
         <p:spPr>
           <a:xfrm>
-            <a:off x="5065776" y="1444752"/>
-            <a:ext cx="4498848" cy="1051560"/>
+            <a:off x="5065776" y="1527048"/>
+            <a:ext cx="4498848" cy="1234440"/>
           </a:xfrm>
           <a:prstGeom prst="roundRect">
             <a:avLst>
@@ -7054,7 +7108,7 @@
         </p:nvSpPr>
         <p:spPr>
           <a:xfrm>
-            <a:off x="5175504" y="1554480"/>
+            <a:off x="5175504" y="1636776"/>
             <a:ext cx="292608" cy="292608"/>
           </a:xfrm>
           <a:prstGeom prst="ellipse">
@@ -7086,6 +7140,12 @@
           <a:lstStyle/>
           <a:p>
             <a:pPr algn="ctr">
+              <a:spcBef>
+                <a:spcPts val="0"/>
+              </a:spcBef>
+              <a:spcAft>
+                <a:spcPts val="0"/>
+              </a:spcAft>
               <a:defRPr sz="800" b="1">
                 <a:solidFill>
                   <a:srgbClr val="FFFFFF"/>
@@ -7107,7 +7167,7 @@
         </p:nvSpPr>
         <p:spPr>
           <a:xfrm>
-            <a:off x="5522976" y="1517904"/>
+            <a:off x="5522976" y="1600200"/>
             <a:ext cx="3950208" cy="274320"/>
           </a:xfrm>
           <a:prstGeom prst="rect">
@@ -7143,8 +7203,8 @@
         </p:nvSpPr>
         <p:spPr>
           <a:xfrm>
-            <a:off x="5202936" y="1828800"/>
-            <a:ext cx="4224528" cy="594360"/>
+            <a:off x="5202936" y="1911096"/>
+            <a:ext cx="4224528" cy="777240"/>
           </a:xfrm>
           <a:prstGeom prst="rect">
             <a:avLst/>
@@ -7179,7 +7239,7 @@
         </p:nvSpPr>
         <p:spPr>
           <a:xfrm>
-            <a:off x="9564624" y="1888236"/>
+            <a:off x="9564624" y="2061972"/>
             <a:ext cx="164592" cy="164592"/>
           </a:xfrm>
           <a:prstGeom prst="rightArrow">
@@ -7222,8 +7282,8 @@
         </p:nvSpPr>
         <p:spPr>
           <a:xfrm>
-            <a:off x="9674352" y="1444752"/>
-            <a:ext cx="4498848" cy="1051560"/>
+            <a:off x="9674352" y="1527048"/>
+            <a:ext cx="4498848" cy="1234440"/>
           </a:xfrm>
           <a:prstGeom prst="roundRect">
             <a:avLst>
@@ -7269,7 +7329,7 @@
         </p:nvSpPr>
         <p:spPr>
           <a:xfrm>
-            <a:off x="9784080" y="1554480"/>
+            <a:off x="9784080" y="1636776"/>
             <a:ext cx="292608" cy="292608"/>
           </a:xfrm>
           <a:prstGeom prst="ellipse">
@@ -7301,6 +7361,12 @@
           <a:lstStyle/>
           <a:p>
             <a:pPr algn="ctr">
+              <a:spcBef>
+                <a:spcPts val="0"/>
+              </a:spcBef>
+              <a:spcAft>
+                <a:spcPts val="0"/>
+              </a:spcAft>
               <a:defRPr sz="800" b="1">
                 <a:solidFill>
                   <a:srgbClr val="FFFFFF"/>
@@ -7322,7 +7388,7 @@
         </p:nvSpPr>
         <p:spPr>
           <a:xfrm>
-            <a:off x="10131552" y="1517904"/>
+            <a:off x="10131552" y="1600200"/>
             <a:ext cx="3950208" cy="274320"/>
           </a:xfrm>
           <a:prstGeom prst="rect">
@@ -7358,7 +7424,7 @@
         </p:nvSpPr>
         <p:spPr>
           <a:xfrm>
-            <a:off x="13258800" y="1536192"/>
+            <a:off x="13258800" y="1618488"/>
             <a:ext cx="777240" cy="201168"/>
           </a:xfrm>
           <a:prstGeom prst="roundRect">
@@ -7415,8 +7481,8 @@
         </p:nvSpPr>
         <p:spPr>
           <a:xfrm>
-            <a:off x="9811512" y="1828800"/>
-            <a:ext cx="4224528" cy="594360"/>
+            <a:off x="9811512" y="1911096"/>
+            <a:ext cx="4224528" cy="777240"/>
           </a:xfrm>
           <a:prstGeom prst="rect">
             <a:avLst/>
@@ -7451,7 +7517,7 @@
         </p:nvSpPr>
         <p:spPr>
           <a:xfrm>
-            <a:off x="2624328" y="2569464"/>
+            <a:off x="2624328" y="2788920"/>
             <a:ext cx="164592" cy="228600"/>
           </a:xfrm>
           <a:prstGeom prst="downArrow">
@@ -7494,7 +7560,7 @@
         </p:nvSpPr>
         <p:spPr>
           <a:xfrm>
-            <a:off x="7232904" y="2569464"/>
+            <a:off x="7232904" y="2788920"/>
             <a:ext cx="164592" cy="228600"/>
           </a:xfrm>
           <a:prstGeom prst="downArrow">
@@ -7537,7 +7603,7 @@
         </p:nvSpPr>
         <p:spPr>
           <a:xfrm>
-            <a:off x="11841480" y="2569464"/>
+            <a:off x="11841480" y="2788920"/>
             <a:ext cx="164592" cy="228600"/>
           </a:xfrm>
           <a:prstGeom prst="downArrow">
@@ -7580,7 +7646,7 @@
         </p:nvSpPr>
         <p:spPr>
           <a:xfrm>
-            <a:off x="457200" y="2862072"/>
+            <a:off x="457200" y="3063240"/>
             <a:ext cx="3017520" cy="320040"/>
           </a:xfrm>
           <a:prstGeom prst="roundRect">
@@ -7625,7 +7691,7 @@
         </p:nvSpPr>
         <p:spPr>
           <a:xfrm>
-            <a:off x="594360" y="2898648"/>
+            <a:off x="594360" y="3099816"/>
             <a:ext cx="2743200" cy="320040"/>
           </a:xfrm>
           <a:prstGeom prst="rect">
@@ -7661,8 +7727,8 @@
         </p:nvSpPr>
         <p:spPr>
           <a:xfrm>
-            <a:off x="457200" y="3255264"/>
-            <a:ext cx="3017520" cy="960120"/>
+            <a:off x="457200" y="3493008"/>
+            <a:ext cx="3017520" cy="1005840"/>
           </a:xfrm>
           <a:prstGeom prst="roundRect">
             <a:avLst>
@@ -7708,7 +7774,7 @@
         </p:nvSpPr>
         <p:spPr>
           <a:xfrm>
-            <a:off x="566928" y="3364992"/>
+            <a:off x="566928" y="3602736"/>
             <a:ext cx="292608" cy="292608"/>
           </a:xfrm>
           <a:prstGeom prst="ellipse">
@@ -7740,6 +7806,12 @@
           <a:lstStyle/>
           <a:p>
             <a:pPr algn="ctr">
+              <a:spcBef>
+                <a:spcPts val="0"/>
+              </a:spcBef>
+              <a:spcAft>
+                <a:spcPts val="0"/>
+              </a:spcAft>
               <a:defRPr sz="800" b="1">
                 <a:solidFill>
                   <a:srgbClr val="FFFFFF"/>
@@ -7761,7 +7833,7 @@
         </p:nvSpPr>
         <p:spPr>
           <a:xfrm>
-            <a:off x="914400" y="3328416"/>
+            <a:off x="914400" y="3566160"/>
             <a:ext cx="2468880" cy="274320"/>
           </a:xfrm>
           <a:prstGeom prst="rect">
@@ -7797,8 +7869,8 @@
         </p:nvSpPr>
         <p:spPr>
           <a:xfrm>
-            <a:off x="594360" y="3639312"/>
-            <a:ext cx="2743200" cy="502920"/>
+            <a:off x="594360" y="3877056"/>
+            <a:ext cx="2743200" cy="548640"/>
           </a:xfrm>
           <a:prstGeom prst="rect">
             <a:avLst/>
@@ -7833,7 +7905,7 @@
         </p:nvSpPr>
         <p:spPr>
           <a:xfrm>
-            <a:off x="1883664" y="4233672"/>
+            <a:off x="1883664" y="4498848"/>
             <a:ext cx="164592" cy="228600"/>
           </a:xfrm>
           <a:prstGeom prst="downArrow">
@@ -7876,8 +7948,8 @@
         </p:nvSpPr>
         <p:spPr>
           <a:xfrm>
-            <a:off x="457200" y="4471416"/>
-            <a:ext cx="3017520" cy="960120"/>
+            <a:off x="457200" y="4754880"/>
+            <a:ext cx="3017520" cy="1005840"/>
           </a:xfrm>
           <a:prstGeom prst="roundRect">
             <a:avLst>
@@ -7923,7 +7995,7 @@
         </p:nvSpPr>
         <p:spPr>
           <a:xfrm>
-            <a:off x="566928" y="4581144"/>
+            <a:off x="566928" y="4864608"/>
             <a:ext cx="292608" cy="292608"/>
           </a:xfrm>
           <a:prstGeom prst="ellipse">
@@ -7955,6 +8027,12 @@
           <a:lstStyle/>
           <a:p>
             <a:pPr algn="ctr">
+              <a:spcBef>
+                <a:spcPts val="0"/>
+              </a:spcBef>
+              <a:spcAft>
+                <a:spcPts val="0"/>
+              </a:spcAft>
               <a:defRPr sz="800" b="1">
                 <a:solidFill>
                   <a:srgbClr val="FFFFFF"/>
@@ -7976,7 +8054,7 @@
         </p:nvSpPr>
         <p:spPr>
           <a:xfrm>
-            <a:off x="914400" y="4544568"/>
+            <a:off x="914400" y="4828032"/>
             <a:ext cx="2468880" cy="274320"/>
           </a:xfrm>
           <a:prstGeom prst="rect">
@@ -8012,7 +8090,7 @@
         </p:nvSpPr>
         <p:spPr>
           <a:xfrm>
-            <a:off x="2560320" y="4562856"/>
+            <a:off x="2560320" y="4846320"/>
             <a:ext cx="777240" cy="201168"/>
           </a:xfrm>
           <a:prstGeom prst="roundRect">
@@ -8069,8 +8147,8 @@
         </p:nvSpPr>
         <p:spPr>
           <a:xfrm>
-            <a:off x="594360" y="4855464"/>
-            <a:ext cx="2743200" cy="502920"/>
+            <a:off x="594360" y="5138928"/>
+            <a:ext cx="2743200" cy="548640"/>
           </a:xfrm>
           <a:prstGeom prst="rect">
             <a:avLst/>
@@ -8105,7 +8183,7 @@
         </p:nvSpPr>
         <p:spPr>
           <a:xfrm>
-            <a:off x="3511296" y="3653028"/>
+            <a:off x="3511296" y="3913632"/>
             <a:ext cx="164592" cy="164592"/>
           </a:xfrm>
           <a:prstGeom prst="rightArrow">
@@ -8148,7 +8226,7 @@
         </p:nvSpPr>
         <p:spPr>
           <a:xfrm>
-            <a:off x="3511296" y="4869180"/>
+            <a:off x="3511296" y="5175504"/>
             <a:ext cx="164592" cy="164592"/>
           </a:xfrm>
           <a:prstGeom prst="rightArrow">
@@ -8191,18 +8269,18 @@
         </p:nvSpPr>
         <p:spPr>
           <a:xfrm>
-            <a:off x="3703320" y="2862072"/>
-            <a:ext cx="6766560" cy="2240280"/>
+            <a:off x="3703320" y="3063240"/>
+            <a:ext cx="6766560" cy="2331720"/>
           </a:xfrm>
           <a:prstGeom prst="roundRect">
             <a:avLst>
-              <a:gd name="adj" fmla="val 4000"/>
+              <a:gd name="adj" fmla="val 5000"/>
             </a:avLst>
           </a:prstGeom>
           <a:solidFill>
             <a:srgbClr val="FFFFFF"/>
           </a:solidFill>
-          <a:ln w="44450">
+          <a:ln w="38100">
             <a:solidFill>
               <a:srgbClr val="DC3C3C"/>
             </a:solidFill>
@@ -8238,8 +8316,8 @@
         </p:nvSpPr>
         <p:spPr>
           <a:xfrm>
-            <a:off x="3886200" y="3044952"/>
-            <a:ext cx="457200" cy="457200"/>
+            <a:off x="3813048" y="3172968"/>
+            <a:ext cx="292608" cy="292608"/>
           </a:xfrm>
           <a:prstGeom prst="ellipse">
             <a:avLst/>
@@ -8270,7 +8348,13 @@
           <a:lstStyle/>
           <a:p>
             <a:pPr algn="ctr">
-              <a:defRPr sz="1000" b="1">
+              <a:spcBef>
+                <a:spcPts val="0"/>
+              </a:spcBef>
+              <a:spcAft>
+                <a:spcPts val="0"/>
+              </a:spcAft>
+              <a:defRPr sz="800" b="1">
                 <a:solidFill>
                   <a:srgbClr val="FFFFFF"/>
                 </a:solidFill>
@@ -8278,7 +8362,7 @@
               </a:defRPr>
             </a:pPr>
             <a:r>
-              <a:t>HUB</a:t>
+              <a:t>★</a:t>
             </a:r>
           </a:p>
         </p:txBody>
@@ -8291,8 +8375,8 @@
         </p:nvSpPr>
         <p:spPr>
           <a:xfrm>
-            <a:off x="4434840" y="3044952"/>
-            <a:ext cx="5852160" cy="365760"/>
+            <a:off x="4160520" y="3136392"/>
+            <a:ext cx="6217920" cy="274320"/>
           </a:xfrm>
           <a:prstGeom prst="rect">
             <a:avLst/>
@@ -8306,7 +8390,7 @@
           <a:lstStyle/>
           <a:p>
             <a:pPr algn="l">
-              <a:defRPr sz="1800" b="1">
+              <a:defRPr sz="1100" b="1">
                 <a:solidFill>
                   <a:srgbClr val="1A1A2E"/>
                 </a:solidFill>
@@ -8314,61 +8398,25 @@
               </a:defRPr>
             </a:pPr>
             <a:r>
-              <a:t>Virtuoso + Spectre</a:t>
-            </a:r>
-          </a:p>
-        </p:txBody>
-      </p:sp>
-      <p:sp>
-        <p:nvSpPr>
-          <p:cNvPr id="51" name="TextBox 50"/>
-          <p:cNvSpPr txBox="1"/>
-          <p:nvPr/>
-        </p:nvSpPr>
-        <p:spPr>
-          <a:xfrm>
-            <a:off x="4434840" y="3410712"/>
-            <a:ext cx="5852160" cy="274320"/>
-          </a:xfrm>
-          <a:prstGeom prst="rect">
-            <a:avLst/>
-          </a:prstGeom>
-          <a:noFill/>
-        </p:spPr>
-        <p:txBody>
-          <a:bodyPr wrap="square">
-            <a:spAutoFit/>
-          </a:bodyPr>
-          <a:lstStyle/>
-          <a:p>
-            <a:pPr algn="l">
-              <a:defRPr sz="1000" b="1">
-                <a:solidFill>
-                  <a:srgbClr val="5A6378"/>
-                </a:solidFill>
-                <a:latin typeface="Segoe UI"/>
-              </a:defRPr>
-            </a:pPr>
-            <a:r>
-              <a:t>Custom / Analog IC Design  •  ~75%+ Market Share  •  The Gravitational Center</a:t>
-            </a:r>
-          </a:p>
-        </p:txBody>
-      </p:sp>
-      <p:sp>
-        <p:nvSpPr>
-          <p:cNvPr id="52" name="Rounded Rectangle 51"/>
+              <a:t>Virtuoso + Spectre  —  Custom / Analog IC Design</a:t>
+            </a:r>
+          </a:p>
+        </p:txBody>
+      </p:sp>
+      <p:sp>
+        <p:nvSpPr>
+          <p:cNvPr id="51" name="Rounded Rectangle 50"/>
           <p:cNvSpPr/>
           <p:nvPr/>
         </p:nvSpPr>
         <p:spPr>
           <a:xfrm>
-            <a:off x="9006840" y="3044952"/>
-            <a:ext cx="1280160" cy="256032"/>
+            <a:off x="9098280" y="3154680"/>
+            <a:ext cx="1234440" cy="201168"/>
           </a:xfrm>
           <a:prstGeom prst="roundRect">
             <a:avLst>
-              <a:gd name="adj" fmla="val 30000"/>
+              <a:gd name="adj" fmla="val 5000"/>
             </a:avLst>
           </a:prstGeom>
           <a:solidFill>
@@ -8399,7 +8447,7 @@
           <a:lstStyle/>
           <a:p>
             <a:pPr algn="ctr">
-              <a:defRPr sz="800" b="1">
+              <a:defRPr sz="700" b="1">
                 <a:solidFill>
                   <a:srgbClr val="C62828"/>
                 </a:solidFill>
@@ -8407,21 +8455,21 @@
               </a:defRPr>
             </a:pPr>
             <a:r>
-              <a:t>Unassailable Moat</a:t>
-            </a:r>
-          </a:p>
-        </p:txBody>
-      </p:sp>
-      <p:sp>
-        <p:nvSpPr>
-          <p:cNvPr id="53" name="TextBox 52"/>
+              <a:t>~75%+ Share</a:t>
+            </a:r>
+          </a:p>
+        </p:txBody>
+      </p:sp>
+      <p:sp>
+        <p:nvSpPr>
+          <p:cNvPr id="52" name="TextBox 51"/>
           <p:cNvSpPr txBox="1"/>
           <p:nvPr/>
         </p:nvSpPr>
         <p:spPr>
           <a:xfrm>
-            <a:off x="3977640" y="3776472"/>
-            <a:ext cx="6217920" cy="274320"/>
+            <a:off x="3840480" y="3447288"/>
+            <a:ext cx="6492240" cy="274320"/>
           </a:xfrm>
           <a:prstGeom prst="rect">
             <a:avLst/>
@@ -8450,14 +8498,14 @@
       </p:sp>
       <p:sp>
         <p:nvSpPr>
-          <p:cNvPr id="54" name="TextBox 53"/>
+          <p:cNvPr id="53" name="TextBox 52"/>
           <p:cNvSpPr txBox="1"/>
           <p:nvPr/>
         </p:nvSpPr>
         <p:spPr>
           <a:xfrm>
-            <a:off x="3977640" y="4069080"/>
-            <a:ext cx="6217920" cy="274320"/>
+            <a:off x="3840480" y="3794760"/>
+            <a:ext cx="6492240" cy="274320"/>
           </a:xfrm>
           <a:prstGeom prst="rect">
             <a:avLst/>
@@ -8486,14 +8534,14 @@
       </p:sp>
       <p:sp>
         <p:nvSpPr>
-          <p:cNvPr id="55" name="TextBox 54"/>
+          <p:cNvPr id="54" name="TextBox 53"/>
           <p:cNvSpPr txBox="1"/>
           <p:nvPr/>
         </p:nvSpPr>
         <p:spPr>
           <a:xfrm>
-            <a:off x="3977640" y="4361688"/>
-            <a:ext cx="6217920" cy="274320"/>
+            <a:off x="3840480" y="4142232"/>
+            <a:ext cx="6492240" cy="274320"/>
           </a:xfrm>
           <a:prstGeom prst="rect">
             <a:avLst/>
@@ -8522,14 +8570,14 @@
       </p:sp>
       <p:sp>
         <p:nvSpPr>
-          <p:cNvPr id="56" name="TextBox 55"/>
+          <p:cNvPr id="55" name="TextBox 54"/>
           <p:cNvSpPr txBox="1"/>
           <p:nvPr/>
         </p:nvSpPr>
         <p:spPr>
           <a:xfrm>
-            <a:off x="3977640" y="4654296"/>
-            <a:ext cx="6217920" cy="274320"/>
+            <a:off x="3840480" y="4489704"/>
+            <a:ext cx="6492240" cy="274320"/>
           </a:xfrm>
           <a:prstGeom prst="rect">
             <a:avLst/>
@@ -8558,13 +8606,49 @@
       </p:sp>
       <p:sp>
         <p:nvSpPr>
+          <p:cNvPr id="56" name="TextBox 55"/>
+          <p:cNvSpPr txBox="1"/>
+          <p:nvPr/>
+        </p:nvSpPr>
+        <p:spPr>
+          <a:xfrm>
+            <a:off x="3840480" y="4837176"/>
+            <a:ext cx="6492240" cy="274320"/>
+          </a:xfrm>
+          <a:prstGeom prst="rect">
+            <a:avLst/>
+          </a:prstGeom>
+          <a:noFill/>
+        </p:spPr>
+        <p:txBody>
+          <a:bodyPr wrap="square">
+            <a:spAutoFit/>
+          </a:bodyPr>
+          <a:lstStyle/>
+          <a:p>
+            <a:pPr algn="l">
+              <a:defRPr sz="800" b="0">
+                <a:solidFill>
+                  <a:srgbClr val="5A6378"/>
+                </a:solidFill>
+                <a:latin typeface="Segoe UI"/>
+              </a:defRPr>
+            </a:pPr>
+            <a:r>
+              <a:t>As nodes shrink (3nm, 2nm), analog design gets harder — Virtuoso becomes MORE critical, not less. The moat is widening.</a:t>
+            </a:r>
+          </a:p>
+        </p:txBody>
+      </p:sp>
+      <p:sp>
+        <p:nvSpPr>
           <p:cNvPr id="57" name="Rounded Rectangle 56"/>
           <p:cNvSpPr/>
           <p:nvPr/>
         </p:nvSpPr>
         <p:spPr>
           <a:xfrm>
-            <a:off x="10698480" y="2862072"/>
+            <a:off x="10698480" y="3063240"/>
             <a:ext cx="3017520" cy="320040"/>
           </a:xfrm>
           <a:prstGeom prst="roundRect">
@@ -8609,7 +8693,7 @@
         </p:nvSpPr>
         <p:spPr>
           <a:xfrm>
-            <a:off x="10835640" y="2898648"/>
+            <a:off x="10835640" y="3099816"/>
             <a:ext cx="2743200" cy="320040"/>
           </a:xfrm>
           <a:prstGeom prst="rect">
@@ -8645,8 +8729,8 @@
         </p:nvSpPr>
         <p:spPr>
           <a:xfrm>
-            <a:off x="10698480" y="3255264"/>
-            <a:ext cx="3017520" cy="960120"/>
+            <a:off x="10698480" y="3493008"/>
+            <a:ext cx="3017520" cy="1005840"/>
           </a:xfrm>
           <a:prstGeom prst="roundRect">
             <a:avLst>
@@ -8692,7 +8776,7 @@
         </p:nvSpPr>
         <p:spPr>
           <a:xfrm>
-            <a:off x="10808208" y="3364992"/>
+            <a:off x="10808208" y="3602736"/>
             <a:ext cx="292608" cy="292608"/>
           </a:xfrm>
           <a:prstGeom prst="ellipse">
@@ -8724,6 +8808,12 @@
           <a:lstStyle/>
           <a:p>
             <a:pPr algn="ctr">
+              <a:spcBef>
+                <a:spcPts val="0"/>
+              </a:spcBef>
+              <a:spcAft>
+                <a:spcPts val="0"/>
+              </a:spcAft>
               <a:defRPr sz="800" b="1">
                 <a:solidFill>
                   <a:srgbClr val="FFFFFF"/>
@@ -8745,7 +8835,7 @@
         </p:nvSpPr>
         <p:spPr>
           <a:xfrm>
-            <a:off x="11155680" y="3328416"/>
+            <a:off x="11155680" y="3566160"/>
             <a:ext cx="2468880" cy="274320"/>
           </a:xfrm>
           <a:prstGeom prst="rect">
@@ -8781,7 +8871,7 @@
         </p:nvSpPr>
         <p:spPr>
           <a:xfrm>
-            <a:off x="12801600" y="3346704"/>
+            <a:off x="12801600" y="3584448"/>
             <a:ext cx="777240" cy="201168"/>
           </a:xfrm>
           <a:prstGeom prst="roundRect">
@@ -8838,8 +8928,8 @@
         </p:nvSpPr>
         <p:spPr>
           <a:xfrm>
-            <a:off x="10835640" y="3639312"/>
-            <a:ext cx="2743200" cy="502920"/>
+            <a:off x="10835640" y="3877056"/>
+            <a:ext cx="2743200" cy="548640"/>
           </a:xfrm>
           <a:prstGeom prst="rect">
             <a:avLst/>
@@ -8874,7 +8964,7 @@
         </p:nvSpPr>
         <p:spPr>
           <a:xfrm>
-            <a:off x="12124944" y="4233672"/>
+            <a:off x="12124944" y="4498848"/>
             <a:ext cx="164592" cy="228600"/>
           </a:xfrm>
           <a:prstGeom prst="downArrow">
@@ -8917,8 +9007,8 @@
         </p:nvSpPr>
         <p:spPr>
           <a:xfrm>
-            <a:off x="10698480" y="4471416"/>
-            <a:ext cx="3017520" cy="960120"/>
+            <a:off x="10698480" y="4754880"/>
+            <a:ext cx="3017520" cy="1005840"/>
           </a:xfrm>
           <a:prstGeom prst="roundRect">
             <a:avLst>
@@ -8964,7 +9054,7 @@
         </p:nvSpPr>
         <p:spPr>
           <a:xfrm>
-            <a:off x="10808208" y="4581144"/>
+            <a:off x="10808208" y="4864608"/>
             <a:ext cx="292608" cy="292608"/>
           </a:xfrm>
           <a:prstGeom prst="ellipse">
@@ -8996,6 +9086,12 @@
           <a:lstStyle/>
           <a:p>
             <a:pPr algn="ctr">
+              <a:spcBef>
+                <a:spcPts val="0"/>
+              </a:spcBef>
+              <a:spcAft>
+                <a:spcPts val="0"/>
+              </a:spcAft>
               <a:defRPr sz="800" b="1">
                 <a:solidFill>
                   <a:srgbClr val="FFFFFF"/>
@@ -9017,7 +9113,7 @@
         </p:nvSpPr>
         <p:spPr>
           <a:xfrm>
-            <a:off x="11155680" y="4544568"/>
+            <a:off x="11155680" y="4828032"/>
             <a:ext cx="2468880" cy="274320"/>
           </a:xfrm>
           <a:prstGeom prst="rect">
@@ -9053,8 +9149,8 @@
         </p:nvSpPr>
         <p:spPr>
           <a:xfrm>
-            <a:off x="10835640" y="4855464"/>
-            <a:ext cx="2743200" cy="502920"/>
+            <a:off x="10835640" y="5138928"/>
+            <a:ext cx="2743200" cy="548640"/>
           </a:xfrm>
           <a:prstGeom prst="rect">
             <a:avLst/>
@@ -9089,7 +9185,7 @@
         </p:nvSpPr>
         <p:spPr>
           <a:xfrm>
-            <a:off x="10497312" y="3653028"/>
+            <a:off x="10497312" y="3913632"/>
             <a:ext cx="164592" cy="164592"/>
           </a:xfrm>
           <a:prstGeom prst="leftArrow">
@@ -9132,7 +9228,7 @@
         </p:nvSpPr>
         <p:spPr>
           <a:xfrm>
-            <a:off x="10497312" y="4869180"/>
+            <a:off x="10497312" y="5175504"/>
             <a:ext cx="164592" cy="164592"/>
           </a:xfrm>
           <a:prstGeom prst="leftArrow">
@@ -9175,8 +9271,8 @@
         </p:nvSpPr>
         <p:spPr>
           <a:xfrm>
-            <a:off x="2624328" y="5175504"/>
-            <a:ext cx="164592" cy="201168"/>
+            <a:off x="2624328" y="5422392"/>
+            <a:ext cx="164592" cy="228600"/>
           </a:xfrm>
           <a:prstGeom prst="upArrow">
             <a:avLst/>
@@ -9218,8 +9314,8 @@
         </p:nvSpPr>
         <p:spPr>
           <a:xfrm>
-            <a:off x="7232904" y="5175504"/>
-            <a:ext cx="164592" cy="201168"/>
+            <a:off x="7232904" y="5422392"/>
+            <a:ext cx="164592" cy="228600"/>
           </a:xfrm>
           <a:prstGeom prst="upArrow">
             <a:avLst/>
@@ -9261,8 +9357,8 @@
         </p:nvSpPr>
         <p:spPr>
           <a:xfrm>
-            <a:off x="11841480" y="5175504"/>
-            <a:ext cx="164592" cy="201168"/>
+            <a:off x="11841480" y="5422392"/>
+            <a:ext cx="164592" cy="228600"/>
           </a:xfrm>
           <a:prstGeom prst="upArrow">
             <a:avLst/>
@@ -9304,7 +9400,7 @@
         </p:nvSpPr>
         <p:spPr>
           <a:xfrm>
-            <a:off x="457200" y="5431536"/>
+            <a:off x="457200" y="5696712"/>
             <a:ext cx="13716000" cy="320040"/>
           </a:xfrm>
           <a:prstGeom prst="roundRect">
@@ -9349,7 +9445,7 @@
         </p:nvSpPr>
         <p:spPr>
           <a:xfrm>
-            <a:off x="594360" y="5468112"/>
+            <a:off x="594360" y="5733288"/>
             <a:ext cx="13441680" cy="320040"/>
           </a:xfrm>
           <a:prstGeom prst="rect">
@@ -9372,7 +9468,7 @@
               </a:defRPr>
             </a:pPr>
             <a:r>
-              <a:t>PCB &amp; SYSTEM  —  Chip to Board  (Synopsys has NO equivalent)</a:t>
+              <a:t>PCB &amp; SYSTEM  —  Chip to Board</a:t>
             </a:r>
           </a:p>
         </p:txBody>
@@ -9385,7 +9481,7 @@
         </p:nvSpPr>
         <p:spPr>
           <a:xfrm>
-            <a:off x="12161520" y="5468112"/>
+            <a:off x="12161520" y="5733288"/>
             <a:ext cx="1920240" cy="320040"/>
           </a:xfrm>
           <a:prstGeom prst="rect">
@@ -9408,7 +9504,7 @@
               </a:defRPr>
             </a:pPr>
             <a:r>
-              <a:t>Unique to Cadence</a:t>
+              <a:t>Unique to Cadence  |  No Synopsys Equivalent</a:t>
             </a:r>
           </a:p>
         </p:txBody>
@@ -9421,8 +9517,8 @@
         </p:nvSpPr>
         <p:spPr>
           <a:xfrm>
-            <a:off x="457200" y="5824728"/>
-            <a:ext cx="4498848" cy="1051560"/>
+            <a:off x="457200" y="6126480"/>
+            <a:ext cx="4498848" cy="1234440"/>
           </a:xfrm>
           <a:prstGeom prst="roundRect">
             <a:avLst>
@@ -9468,7 +9564,7 @@
         </p:nvSpPr>
         <p:spPr>
           <a:xfrm>
-            <a:off x="566928" y="5934456"/>
+            <a:off x="566928" y="6236208"/>
             <a:ext cx="292608" cy="292608"/>
           </a:xfrm>
           <a:prstGeom prst="ellipse">
@@ -9500,6 +9596,12 @@
           <a:lstStyle/>
           <a:p>
             <a:pPr algn="ctr">
+              <a:spcBef>
+                <a:spcPts val="0"/>
+              </a:spcBef>
+              <a:spcAft>
+                <a:spcPts val="0"/>
+              </a:spcAft>
               <a:defRPr sz="800" b="1">
                 <a:solidFill>
                   <a:srgbClr val="FFFFFF"/>
@@ -9521,7 +9623,7 @@
         </p:nvSpPr>
         <p:spPr>
           <a:xfrm>
-            <a:off x="914400" y="5897880"/>
+            <a:off x="914400" y="6199632"/>
             <a:ext cx="3950208" cy="274320"/>
           </a:xfrm>
           <a:prstGeom prst="rect">
@@ -9557,7 +9659,7 @@
         </p:nvSpPr>
         <p:spPr>
           <a:xfrm>
-            <a:off x="4041648" y="5916168"/>
+            <a:off x="4041648" y="6217920"/>
             <a:ext cx="777240" cy="201168"/>
           </a:xfrm>
           <a:prstGeom prst="roundRect">
@@ -9614,8 +9716,8 @@
         </p:nvSpPr>
         <p:spPr>
           <a:xfrm>
-            <a:off x="594360" y="6208776"/>
-            <a:ext cx="4224528" cy="594360"/>
+            <a:off x="594360" y="6510528"/>
+            <a:ext cx="4224528" cy="777240"/>
           </a:xfrm>
           <a:prstGeom prst="rect">
             <a:avLst/>
@@ -9650,7 +9752,7 @@
         </p:nvSpPr>
         <p:spPr>
           <a:xfrm>
-            <a:off x="4956048" y="6268212"/>
+            <a:off x="4956048" y="6661404"/>
             <a:ext cx="164592" cy="164592"/>
           </a:xfrm>
           <a:prstGeom prst="rightArrow">
@@ -9693,8 +9795,8 @@
         </p:nvSpPr>
         <p:spPr>
           <a:xfrm>
-            <a:off x="5065776" y="5824728"/>
-            <a:ext cx="4498848" cy="1051560"/>
+            <a:off x="5065776" y="6126480"/>
+            <a:ext cx="4498848" cy="1234440"/>
           </a:xfrm>
           <a:prstGeom prst="roundRect">
             <a:avLst>
@@ -9740,7 +9842,7 @@
         </p:nvSpPr>
         <p:spPr>
           <a:xfrm>
-            <a:off x="5175504" y="5934456"/>
+            <a:off x="5175504" y="6236208"/>
             <a:ext cx="292608" cy="292608"/>
           </a:xfrm>
           <a:prstGeom prst="ellipse">
@@ -9772,6 +9874,12 @@
           <a:lstStyle/>
           <a:p>
             <a:pPr algn="ctr">
+              <a:spcBef>
+                <a:spcPts val="0"/>
+              </a:spcBef>
+              <a:spcAft>
+                <a:spcPts val="0"/>
+              </a:spcAft>
               <a:defRPr sz="800" b="1">
                 <a:solidFill>
                   <a:srgbClr val="FFFFFF"/>
@@ -9793,7 +9901,7 @@
         </p:nvSpPr>
         <p:spPr>
           <a:xfrm>
-            <a:off x="5522976" y="5897880"/>
+            <a:off x="5522976" y="6199632"/>
             <a:ext cx="3950208" cy="274320"/>
           </a:xfrm>
           <a:prstGeom prst="rect">
@@ -9829,8 +9937,8 @@
         </p:nvSpPr>
         <p:spPr>
           <a:xfrm>
-            <a:off x="5202936" y="6208776"/>
-            <a:ext cx="4224528" cy="594360"/>
+            <a:off x="5202936" y="6510528"/>
+            <a:ext cx="4224528" cy="777240"/>
           </a:xfrm>
           <a:prstGeom prst="rect">
             <a:avLst/>
@@ -9865,7 +9973,7 @@
         </p:nvSpPr>
         <p:spPr>
           <a:xfrm>
-            <a:off x="9564624" y="6268212"/>
+            <a:off x="9564624" y="6661404"/>
             <a:ext cx="164592" cy="164592"/>
           </a:xfrm>
           <a:prstGeom prst="rightArrow">
@@ -9908,8 +10016,8 @@
         </p:nvSpPr>
         <p:spPr>
           <a:xfrm>
-            <a:off x="9674352" y="5824728"/>
-            <a:ext cx="4498848" cy="1051560"/>
+            <a:off x="9674352" y="6126480"/>
+            <a:ext cx="4498848" cy="1234440"/>
           </a:xfrm>
           <a:prstGeom prst="roundRect">
             <a:avLst>
@@ -9955,7 +10063,7 @@
         </p:nvSpPr>
         <p:spPr>
           <a:xfrm>
-            <a:off x="9784080" y="5934456"/>
+            <a:off x="9784080" y="6236208"/>
             <a:ext cx="292608" cy="292608"/>
           </a:xfrm>
           <a:prstGeom prst="ellipse">
@@ -9987,6 +10095,12 @@
           <a:lstStyle/>
           <a:p>
             <a:pPr algn="ctr">
+              <a:spcBef>
+                <a:spcPts val="0"/>
+              </a:spcBef>
+              <a:spcAft>
+                <a:spcPts val="0"/>
+              </a:spcAft>
               <a:defRPr sz="800" b="1">
                 <a:solidFill>
                   <a:srgbClr val="FFFFFF"/>
@@ -10008,7 +10122,7 @@
         </p:nvSpPr>
         <p:spPr>
           <a:xfrm>
-            <a:off x="10131552" y="5897880"/>
+            <a:off x="10131552" y="6199632"/>
             <a:ext cx="3950208" cy="274320"/>
           </a:xfrm>
           <a:prstGeom prst="rect">
@@ -10044,8 +10158,8 @@
         </p:nvSpPr>
         <p:spPr>
           <a:xfrm>
-            <a:off x="9811512" y="6208776"/>
-            <a:ext cx="4224528" cy="594360"/>
+            <a:off x="9811512" y="6510528"/>
+            <a:ext cx="4224528" cy="777240"/>
           </a:xfrm>
           <a:prstGeom prst="rect">
             <a:avLst/>
@@ -10080,8 +10194,8 @@
         </p:nvSpPr>
         <p:spPr>
           <a:xfrm>
-            <a:off x="457200" y="6967728"/>
-            <a:ext cx="13716000" cy="475488"/>
+            <a:off x="457200" y="7498080"/>
+            <a:ext cx="13716000" cy="594360"/>
           </a:xfrm>
           <a:prstGeom prst="roundRect">
             <a:avLst>
@@ -10089,7 +10203,7 @@
             </a:avLst>
           </a:prstGeom>
           <a:solidFill>
-            <a:srgbClr val="0D2B47"/>
+            <a:srgbClr val="0D472B"/>
           </a:solidFill>
           <a:ln w="25400">
             <a:solidFill>
@@ -10127,8 +10241,8 @@
         </p:nvSpPr>
         <p:spPr>
           <a:xfrm>
-            <a:off x="640080" y="7004304"/>
-            <a:ext cx="3657600" cy="201168"/>
+            <a:off x="640080" y="7552944"/>
+            <a:ext cx="2743200" cy="274320"/>
           </a:xfrm>
           <a:prstGeom prst="rect">
             <a:avLst/>
@@ -10144,13 +10258,13 @@
             <a:pPr algn="l">
               <a:defRPr sz="1200" b="1">
                 <a:solidFill>
-                  <a:srgbClr val="4DA8DA"/>
+                  <a:srgbClr val="DC3C3C"/>
                 </a:solidFill>
                 <a:latin typeface="Segoe UI"/>
               </a:defRPr>
             </a:pPr>
             <a:r>
-              <a:t>PALLADIUM EMULATION  +  PROTIUM</a:t>
+              <a:t>PALLADIUM + PROTIUM</a:t>
             </a:r>
           </a:p>
         </p:txBody>
@@ -10163,8 +10277,8 @@
         </p:nvSpPr>
         <p:spPr>
           <a:xfrm>
-            <a:off x="640080" y="7205472"/>
-            <a:ext cx="12801600" cy="201168"/>
+            <a:off x="640080" y="7790688"/>
+            <a:ext cx="13350240" cy="274320"/>
           </a:xfrm>
           <a:prstGeom prst="rect">
             <a:avLst/>
@@ -10180,13 +10294,13 @@
             <a:pPr algn="l">
               <a:defRPr sz="900" b="0">
                 <a:solidFill>
-                  <a:srgbClr val="A5CEE8"/>
+                  <a:srgbClr val="A5D6A7"/>
                 </a:solidFill>
                 <a:latin typeface="Segoe UI"/>
               </a:defRPr>
             </a:pPr>
             <a:r>
-              <a:t>Hardware emulation ($5-30M systems)  •  FPGA prototyping  •  Multi-year depreciation lock-in  •  Co-leader with Synopsys ZeBu  •  Verification IP (VIP)</a:t>
+              <a:t>Hardware emulation ($5-30M)  •  FPGA prototyping  •  Multi-year lock-in  •  Co-leader with Synopsys ZeBu  •  Verification IP (VIP)</a:t>
             </a:r>
           </a:p>
         </p:txBody>
@@ -10199,8 +10313,8 @@
         </p:nvSpPr>
         <p:spPr>
           <a:xfrm>
-            <a:off x="457200" y="7498080"/>
-            <a:ext cx="13716000" cy="475488"/>
+            <a:off x="457200" y="8156448"/>
+            <a:ext cx="13716000" cy="594360"/>
           </a:xfrm>
           <a:prstGeom prst="roundRect">
             <a:avLst>
@@ -10208,7 +10322,7 @@
             </a:avLst>
           </a:prstGeom>
           <a:solidFill>
-            <a:srgbClr val="0D2B47"/>
+            <a:srgbClr val="0D472B"/>
           </a:solidFill>
           <a:ln w="25400">
             <a:solidFill>
@@ -10246,8 +10360,8 @@
         </p:nvSpPr>
         <p:spPr>
           <a:xfrm>
-            <a:off x="640080" y="7534656"/>
-            <a:ext cx="3657600" cy="201168"/>
+            <a:off x="640080" y="8211312"/>
+            <a:ext cx="2743200" cy="274320"/>
           </a:xfrm>
           <a:prstGeom prst="rect">
             <a:avLst/>
@@ -10263,13 +10377,13 @@
             <a:pPr algn="l">
               <a:defRPr sz="1200" b="1">
                 <a:solidFill>
-                  <a:srgbClr val="4DA8DA"/>
+                  <a:srgbClr val="F0A820"/>
                 </a:solidFill>
                 <a:latin typeface="Segoe UI"/>
               </a:defRPr>
             </a:pPr>
             <a:r>
-              <a:t>TENSILICA IP  +  DESIGN IP</a:t>
+              <a:t>TENSILICA IP + DESIGN IP</a:t>
             </a:r>
           </a:p>
         </p:txBody>
@@ -10282,8 +10396,8 @@
         </p:nvSpPr>
         <p:spPr>
           <a:xfrm>
-            <a:off x="640080" y="7735824"/>
-            <a:ext cx="12801600" cy="201168"/>
+            <a:off x="640080" y="8449056"/>
+            <a:ext cx="13350240" cy="274320"/>
           </a:xfrm>
           <a:prstGeom prst="rect">
             <a:avLst/>
@@ -10299,13 +10413,13 @@
             <a:pPr algn="l">
               <a:defRPr sz="900" b="0">
                 <a:solidFill>
-                  <a:srgbClr val="A5CEE8"/>
+                  <a:srgbClr val="A5D6A7"/>
                 </a:solidFill>
                 <a:latin typeface="Segoe UI"/>
               </a:defRPr>
             </a:pPr>
             <a:r>
-              <a:t>Tensilica DSP/AI processors  •  Interface PHYs (DDR, PCIe, USB)  •  Memory compilers  •  Smaller IP portfolio than Synopsys DesignWare  •  Quantus extraction  •  Pegasus DRC/LVS</a:t>
+              <a:t>Tensilica DSP/AI processors  •  Interface PHYs (DDR, PCIe, USB)  •  Memory compilers  •  Quantus extraction  •  Pegasus DRC/LVS</a:t>
             </a:r>
           </a:p>
         </p:txBody>
